--- a/Little-Blossoms-Tier2-Professional-Pitch.pptx
+++ b/Little-Blossoms-Tier2-Professional-Pitch.pptx
@@ -12,9 +12,10 @@
     <p:sldId id="260" r:id="rId6"/>
     <p:sldId id="261" r:id="rId7"/>
     <p:sldId id="262" r:id="rId8"/>
+    <p:sldId id="263" r:id="rId9"/>
   </p:sldIdLst>
   <p:notesMasterIdLst>
-    <p:notesMasterId r:id="rId9"/>
+    <p:notesMasterId r:id="rId10"/>
   </p:notesMasterIdLst>
   <p:sldSz cx="12188952" cy="6858000"/>
   <p:notesSz cx="6858000" cy="12188952"/>
@@ -1060,6 +1061,94 @@
             <a:fld id="{F7021451-1387-4CA6-816F-3879F97B5CBC}" type="slidenum">
               <a:rPr lang="en-US"/>
               <a:t>7</a:t>
+            </a:fld>
+            <a:endParaRPr lang="en-US"/>
+          </a:p>
+        </p:txBody>
+      </p:sp>
+    </p:spTree>
+    <p:extLst>
+      <p:ext uri="{BB962C8B-B14F-4D97-AF65-F5344CB8AC3E}">
+        <p14:creationId xmlns:p14="http://schemas.microsoft.com/office/powerpoint/2010/main" val="1024086991"/>
+      </p:ext>
+    </p:extLst>
+  </p:cSld>
+  <p:clrMapOvr>
+    <a:masterClrMapping/>
+  </p:clrMapOvr>
+</p:notes>
+</file>
+
+<file path=ppt/notesSlides/notesSlide8.xml><?xml version="1.0" encoding="utf-8"?>
+<p:notes xmlns:a="http://schemas.openxmlformats.org/drawingml/2006/main" xmlns:r="http://schemas.openxmlformats.org/officeDocument/2006/relationships" xmlns:p="http://schemas.openxmlformats.org/presentationml/2006/main">
+  <p:cSld>
+    <p:spTree>
+      <p:nvGrpSpPr>
+        <p:cNvPr id="1" name=""/>
+        <p:cNvGrpSpPr/>
+        <p:nvPr/>
+      </p:nvGrpSpPr>
+      <p:grpSpPr>
+        <a:xfrm>
+          <a:off x="0" y="0"/>
+          <a:ext cx="0" cy="0"/>
+          <a:chOff x="0" y="0"/>
+          <a:chExt cx="0" cy="0"/>
+        </a:xfrm>
+      </p:grpSpPr>
+      <p:sp>
+        <p:nvSpPr>
+          <p:cNvPr id="2" name="Slide Image Placeholder 1"/>
+          <p:cNvSpPr>
+            <a:spLocks noGrp="1" noRot="1" noChangeAspect="1"/>
+          </p:cNvSpPr>
+          <p:nvPr>
+            <p:ph type="sldImg"/>
+          </p:nvPr>
+        </p:nvSpPr>
+        <p:spPr/>
+      </p:sp>
+      <p:sp>
+        <p:nvSpPr>
+          <p:cNvPr id="3" name="Notes Placeholder 2"/>
+          <p:cNvSpPr>
+            <a:spLocks noGrp="1"/>
+          </p:cNvSpPr>
+          <p:nvPr>
+            <p:ph type="body" idx="1"/>
+          </p:nvPr>
+        </p:nvSpPr>
+        <p:spPr/>
+        <p:txBody>
+          <a:bodyPr/>
+          <a:lstStyle/>
+          <a:p>
+            <a:r>
+              <a:rPr lang="en-US" dirty="0"/>
+              <a:t/>
+            </a:r>
+            <a:endParaRPr lang="en-US" dirty="0"/>
+          </a:p>
+        </p:txBody>
+      </p:sp>
+      <p:sp>
+        <p:nvSpPr>
+          <p:cNvPr id="4" name="Slide Number Placeholder 3"/>
+          <p:cNvSpPr>
+            <a:spLocks noGrp="1"/>
+          </p:cNvSpPr>
+          <p:nvPr>
+            <p:ph type="sldNum" sz="quarter" idx="10"/>
+          </p:nvPr>
+        </p:nvSpPr>
+        <p:spPr/>
+        <p:txBody>
+          <a:bodyPr/>
+          <a:lstStyle/>
+          <a:p>
+            <a:fld id="{F7021451-1387-4CA6-816F-3879F97B5CBC}" type="slidenum">
+              <a:rPr lang="en-US"/>
+              <a:t>8</a:t>
             </a:fld>
             <a:endParaRPr lang="en-US"/>
           </a:p>
@@ -2781,7 +2870,7 @@
         <p:spPr>
           <a:xfrm>
             <a:off x="731520" y="457200"/>
-            <a:ext cx="7315200" cy="731520"/>
+            <a:ext cx="10058400" cy="731520"/>
           </a:xfrm>
           <a:prstGeom prst="rect">
             <a:avLst/>
@@ -2805,7 +2894,7 @@
                 <a:ea typeface="Trebuchet MS" pitchFamily="34" charset="-122"/>
                 <a:cs typeface="Trebuchet MS" pitchFamily="34" charset="-120"/>
               </a:rPr>
-              <a:t>Optional add-ons</a:t>
+              <a:t>Designs &amp; everything needed to start</a:t>
             </a:r>
             <a:endParaRPr lang="en-US" sz="3000" dirty="0"/>
           </a:p>
@@ -2820,7 +2909,7 @@
         <p:spPr>
           <a:xfrm>
             <a:off x="731520" y="1188720"/>
-            <a:ext cx="8595360" cy="457200"/>
+            <a:ext cx="10424160" cy="457200"/>
           </a:xfrm>
           <a:prstGeom prst="rect">
             <a:avLst/>
@@ -2844,7 +2933,7 @@
                 <a:ea typeface="Calibri" pitchFamily="34" charset="-122"/>
                 <a:cs typeface="Calibri" pitchFamily="34" charset="-120"/>
               </a:rPr>
-              <a:t>Make your website grow with your school — add what you need, when you need it</a:t>
+              <a:t>We don’t just build the site — we give you the designs it needs and everything required to go live</a:t>
             </a:r>
             <a:endParaRPr lang="en-US" dirty="0"/>
           </a:p>
@@ -2858,20 +2947,18 @@
         </p:nvSpPr>
         <p:spPr>
           <a:xfrm>
-            <a:off x="731520" y="1783080"/>
-            <a:ext cx="5212080" cy="2011680"/>
-          </a:xfrm>
-          <a:prstGeom prst="roundRect">
-            <a:avLst>
-              <a:gd name="adj" fmla="val 11364"/>
-            </a:avLst>
+            <a:off x="822960" y="1920240"/>
+            <a:ext cx="457200" cy="457200"/>
+          </a:xfrm>
+          <a:prstGeom prst="oval">
+            <a:avLst/>
           </a:prstGeom>
           <a:solidFill>
-            <a:srgbClr val="F3EDFB"/>
+            <a:srgbClr val="2EC4B6"/>
           </a:solidFill>
           <a:ln w="12700">
             <a:solidFill>
-              <a:srgbClr val="6F2DBD"/>
+              <a:srgbClr val="2EC4B6"/>
             </a:solidFill>
             <a:prstDash val="solid"/>
           </a:ln>
@@ -2885,34 +2972,34 @@
         </p:nvSpPr>
         <p:spPr>
           <a:xfrm>
-            <a:off x="1005840" y="2011680"/>
-            <a:ext cx="4206240" cy="457200"/>
-          </a:xfrm>
-          <a:prstGeom prst="rect">
-            <a:avLst/>
-          </a:prstGeom>
-          <a:noFill/>
-          <a:ln/>
-        </p:spPr>
-        <p:txBody>
-          <a:bodyPr wrap="square" rtlCol="0" anchor="ctr"/>
-          <a:lstStyle/>
-          <a:p>
-            <a:pPr indent="0" marL="0">
-              <a:buNone/>
-            </a:pPr>
-            <a:r>
-              <a:rPr lang="en-US" sz="1700" b="1" dirty="0">
-                <a:solidFill>
-                  <a:srgbClr val="6F2DBD"/>
+            <a:off x="822960" y="1920240"/>
+            <a:ext cx="457200" cy="457200"/>
+          </a:xfrm>
+          <a:prstGeom prst="rect">
+            <a:avLst/>
+          </a:prstGeom>
+          <a:noFill/>
+          <a:ln/>
+        </p:spPr>
+        <p:txBody>
+          <a:bodyPr wrap="square" rtlCol="0" anchor="ctr"/>
+          <a:lstStyle/>
+          <a:p>
+            <a:pPr algn="ctr" indent="0" marL="0">
+              <a:buNone/>
+            </a:pPr>
+            <a:r>
+              <a:rPr lang="en-US" sz="1600" b="1" dirty="0">
+                <a:solidFill>
+                  <a:srgbClr val="FFFFFF"/>
                 </a:solidFill>
                 <a:latin typeface="Trebuchet MS" pitchFamily="34" charset="0"/>
                 <a:ea typeface="Trebuchet MS" pitchFamily="34" charset="-122"/>
                 <a:cs typeface="Trebuchet MS" pitchFamily="34" charset="-120"/>
               </a:rPr>
-              <a:t>Google Ads</a:t>
-            </a:r>
-            <a:endParaRPr lang="en-US" sz="1700" dirty="0"/>
+              <a:t>1</a:t>
+            </a:r>
+            <a:endParaRPr lang="en-US" sz="1600" dirty="0"/>
           </a:p>
         </p:txBody>
       </p:sp>
@@ -2924,8 +3011,47 @@
         </p:nvSpPr>
         <p:spPr>
           <a:xfrm>
-            <a:off x="1005840" y="2514600"/>
-            <a:ext cx="4480560" cy="640080"/>
+            <a:off x="1463040" y="1892808"/>
+            <a:ext cx="3291840" cy="365760"/>
+          </a:xfrm>
+          <a:prstGeom prst="rect">
+            <a:avLst/>
+          </a:prstGeom>
+          <a:noFill/>
+          <a:ln/>
+        </p:spPr>
+        <p:txBody>
+          <a:bodyPr wrap="square" rtlCol="0" anchor="ctr"/>
+          <a:lstStyle/>
+          <a:p>
+            <a:pPr indent="0" marL="0">
+              <a:buNone/>
+            </a:pPr>
+            <a:r>
+              <a:rPr lang="en-US" sz="1600" b="1" dirty="0">
+                <a:solidFill>
+                  <a:srgbClr val="3A2E29"/>
+                </a:solidFill>
+                <a:latin typeface="Trebuchet MS" pitchFamily="34" charset="0"/>
+                <a:ea typeface="Trebuchet MS" pitchFamily="34" charset="-122"/>
+                <a:cs typeface="Trebuchet MS" pitchFamily="34" charset="-120"/>
+              </a:rPr>
+              <a:t>Additional designs</a:t>
+            </a:r>
+            <a:endParaRPr lang="en-US" sz="1600" dirty="0"/>
+          </a:p>
+        </p:txBody>
+      </p:sp>
+      <p:sp>
+        <p:nvSpPr>
+          <p:cNvPr id="7" name="Text 5"/>
+          <p:cNvSpPr/>
+          <p:nvPr/>
+        </p:nvSpPr>
+        <p:spPr>
+          <a:xfrm>
+            <a:off x="4846320" y="1938528"/>
+            <a:ext cx="6583680" cy="777240"/>
           </a:xfrm>
           <a:prstGeom prst="rect">
             <a:avLst/>
@@ -2949,7 +3075,7 @@
                 <a:ea typeface="Calibri" pitchFamily="34" charset="-122"/>
                 <a:cs typeface="Calibri" pitchFamily="34" charset="-120"/>
               </a:rPr>
-              <a:t>Managed monthly campaign</a:t>
+              <a:t>Logos, banners, icons, poster/brochure graphics, social-media creatives — designed for you in your brand style</a:t>
             </a:r>
             <a:endParaRPr lang="en-US" dirty="0"/>
           </a:p>
@@ -2957,14 +3083,78 @@
       </p:sp>
       <p:sp>
         <p:nvSpPr>
-          <p:cNvPr id="7" name="Text 5"/>
-          <p:cNvSpPr/>
-          <p:nvPr/>
-        </p:nvSpPr>
-        <p:spPr>
-          <a:xfrm>
-            <a:off x="1005840" y="3154680"/>
-            <a:ext cx="4480560" cy="457200"/>
+          <p:cNvPr id="8" name="Shape 6"/>
+          <p:cNvSpPr/>
+          <p:nvPr/>
+        </p:nvSpPr>
+        <p:spPr>
+          <a:xfrm>
+            <a:off x="822960" y="2880360"/>
+            <a:ext cx="457200" cy="457200"/>
+          </a:xfrm>
+          <a:prstGeom prst="oval">
+            <a:avLst/>
+          </a:prstGeom>
+          <a:solidFill>
+            <a:srgbClr val="2EC4B6"/>
+          </a:solidFill>
+          <a:ln w="12700">
+            <a:solidFill>
+              <a:srgbClr val="2EC4B6"/>
+            </a:solidFill>
+            <a:prstDash val="solid"/>
+          </a:ln>
+        </p:spPr>
+      </p:sp>
+      <p:sp>
+        <p:nvSpPr>
+          <p:cNvPr id="9" name="Text 7"/>
+          <p:cNvSpPr/>
+          <p:nvPr/>
+        </p:nvSpPr>
+        <p:spPr>
+          <a:xfrm>
+            <a:off x="822960" y="2880360"/>
+            <a:ext cx="457200" cy="457200"/>
+          </a:xfrm>
+          <a:prstGeom prst="rect">
+            <a:avLst/>
+          </a:prstGeom>
+          <a:noFill/>
+          <a:ln/>
+        </p:spPr>
+        <p:txBody>
+          <a:bodyPr wrap="square" rtlCol="0" anchor="ctr"/>
+          <a:lstStyle/>
+          <a:p>
+            <a:pPr algn="ctr" indent="0" marL="0">
+              <a:buNone/>
+            </a:pPr>
+            <a:r>
+              <a:rPr lang="en-US" sz="1600" b="1" dirty="0">
+                <a:solidFill>
+                  <a:srgbClr val="FFFFFF"/>
+                </a:solidFill>
+                <a:latin typeface="Trebuchet MS" pitchFamily="34" charset="0"/>
+                <a:ea typeface="Trebuchet MS" pitchFamily="34" charset="-122"/>
+                <a:cs typeface="Trebuchet MS" pitchFamily="34" charset="-120"/>
+              </a:rPr>
+              <a:t>2</a:t>
+            </a:r>
+            <a:endParaRPr lang="en-US" sz="1600" dirty="0"/>
+          </a:p>
+        </p:txBody>
+      </p:sp>
+      <p:sp>
+        <p:nvSpPr>
+          <p:cNvPr id="10" name="Text 8"/>
+          <p:cNvSpPr/>
+          <p:nvPr/>
+        </p:nvSpPr>
+        <p:spPr>
+          <a:xfrm>
+            <a:off x="1463040" y="2852928"/>
+            <a:ext cx="3291840" cy="365760"/>
           </a:xfrm>
           <a:prstGeom prst="rect">
             <a:avLst/>
@@ -2980,7 +3170,46 @@
               <a:buNone/>
             </a:pPr>
             <a:r>
-              <a:rPr lang="en-US" i="1" dirty="0">
+              <a:rPr lang="en-US" sz="1600" b="1" dirty="0">
+                <a:solidFill>
+                  <a:srgbClr val="3A2E29"/>
+                </a:solidFill>
+                <a:latin typeface="Trebuchet MS" pitchFamily="34" charset="0"/>
+                <a:ea typeface="Trebuchet MS" pitchFamily="34" charset="-122"/>
+                <a:cs typeface="Trebuchet MS" pitchFamily="34" charset="-120"/>
+              </a:rPr>
+              <a:t>Photos &amp; content</a:t>
+            </a:r>
+            <a:endParaRPr lang="en-US" sz="1600" dirty="0"/>
+          </a:p>
+        </p:txBody>
+      </p:sp>
+      <p:sp>
+        <p:nvSpPr>
+          <p:cNvPr id="11" name="Text 9"/>
+          <p:cNvSpPr/>
+          <p:nvPr/>
+        </p:nvSpPr>
+        <p:spPr>
+          <a:xfrm>
+            <a:off x="4846320" y="2898648"/>
+            <a:ext cx="6583680" cy="777240"/>
+          </a:xfrm>
+          <a:prstGeom prst="rect">
+            <a:avLst/>
+          </a:prstGeom>
+          <a:noFill/>
+          <a:ln/>
+        </p:spPr>
+        <p:txBody>
+          <a:bodyPr wrap="square" rtlCol="0" anchor="ctr"/>
+          <a:lstStyle/>
+          <a:p>
+            <a:pPr indent="0" marL="0">
+              <a:buNone/>
+            </a:pPr>
+            <a:r>
+              <a:rPr lang="en-US" dirty="0">
                 <a:solidFill>
                   <a:srgbClr val="725A4A"/>
                 </a:solidFill>
@@ -2988,7 +3217,7 @@
                 <a:ea typeface="Calibri" pitchFamily="34" charset="-122"/>
                 <a:cs typeface="Calibri" pitchFamily="34" charset="-120"/>
               </a:rPr>
-              <a:t>Ad management (setup + running)</a:t>
+              <a:t>Use your photos or we guide you — we advise and prepare what the site needs</a:t>
             </a:r>
             <a:endParaRPr lang="en-US" dirty="0"/>
           </a:p>
@@ -2996,26 +3225,24 @@
       </p:sp>
       <p:sp>
         <p:nvSpPr>
-          <p:cNvPr id="8" name="Shape 6"/>
-          <p:cNvSpPr/>
-          <p:nvPr/>
-        </p:nvSpPr>
-        <p:spPr>
-          <a:xfrm>
-            <a:off x="6217920" y="1783080"/>
-            <a:ext cx="5212080" cy="2011680"/>
-          </a:xfrm>
-          <a:prstGeom prst="roundRect">
-            <a:avLst>
-              <a:gd name="adj" fmla="val 11364"/>
-            </a:avLst>
+          <p:cNvPr id="12" name="Shape 10"/>
+          <p:cNvSpPr/>
+          <p:nvPr/>
+        </p:nvSpPr>
+        <p:spPr>
+          <a:xfrm>
+            <a:off x="822960" y="3840480"/>
+            <a:ext cx="457200" cy="457200"/>
+          </a:xfrm>
+          <a:prstGeom prst="oval">
+            <a:avLst/>
           </a:prstGeom>
           <a:solidFill>
-            <a:srgbClr val="F3EDFB"/>
+            <a:srgbClr val="2EC4B6"/>
           </a:solidFill>
           <a:ln w="12700">
             <a:solidFill>
-              <a:srgbClr val="6F2DBD"/>
+              <a:srgbClr val="2EC4B6"/>
             </a:solidFill>
             <a:prstDash val="solid"/>
           </a:ln>
@@ -3023,53 +3250,92 @@
       </p:sp>
       <p:sp>
         <p:nvSpPr>
-          <p:cNvPr id="9" name="Text 7"/>
-          <p:cNvSpPr/>
-          <p:nvPr/>
-        </p:nvSpPr>
-        <p:spPr>
-          <a:xfrm>
-            <a:off x="6492240" y="2011680"/>
-            <a:ext cx="4206240" cy="457200"/>
-          </a:xfrm>
-          <a:prstGeom prst="rect">
-            <a:avLst/>
-          </a:prstGeom>
-          <a:noFill/>
-          <a:ln/>
-        </p:spPr>
-        <p:txBody>
-          <a:bodyPr wrap="square" rtlCol="0" anchor="ctr"/>
-          <a:lstStyle/>
-          <a:p>
-            <a:pPr indent="0" marL="0">
-              <a:buNone/>
-            </a:pPr>
-            <a:r>
-              <a:rPr lang="en-US" sz="1700" b="1" dirty="0">
-                <a:solidFill>
-                  <a:srgbClr val="6F2DBD"/>
+          <p:cNvPr id="13" name="Text 11"/>
+          <p:cNvSpPr/>
+          <p:nvPr/>
+        </p:nvSpPr>
+        <p:spPr>
+          <a:xfrm>
+            <a:off x="822960" y="3840480"/>
+            <a:ext cx="457200" cy="457200"/>
+          </a:xfrm>
+          <a:prstGeom prst="rect">
+            <a:avLst/>
+          </a:prstGeom>
+          <a:noFill/>
+          <a:ln/>
+        </p:spPr>
+        <p:txBody>
+          <a:bodyPr wrap="square" rtlCol="0" anchor="ctr"/>
+          <a:lstStyle/>
+          <a:p>
+            <a:pPr algn="ctr" indent="0" marL="0">
+              <a:buNone/>
+            </a:pPr>
+            <a:r>
+              <a:rPr lang="en-US" sz="1600" b="1" dirty="0">
+                <a:solidFill>
+                  <a:srgbClr val="FFFFFF"/>
                 </a:solidFill>
                 <a:latin typeface="Trebuchet MS" pitchFamily="34" charset="0"/>
                 <a:ea typeface="Trebuchet MS" pitchFamily="34" charset="-122"/>
                 <a:cs typeface="Trebuchet MS" pitchFamily="34" charset="-120"/>
               </a:rPr>
-              <a:t>WhatsApp automation</a:t>
-            </a:r>
-            <a:endParaRPr lang="en-US" sz="1700" dirty="0"/>
-          </a:p>
-        </p:txBody>
-      </p:sp>
-      <p:sp>
-        <p:nvSpPr>
-          <p:cNvPr id="10" name="Text 8"/>
-          <p:cNvSpPr/>
-          <p:nvPr/>
-        </p:nvSpPr>
-        <p:spPr>
-          <a:xfrm>
-            <a:off x="6492240" y="2514600"/>
-            <a:ext cx="4480560" cy="640080"/>
+              <a:t>3</a:t>
+            </a:r>
+            <a:endParaRPr lang="en-US" sz="1600" dirty="0"/>
+          </a:p>
+        </p:txBody>
+      </p:sp>
+      <p:sp>
+        <p:nvSpPr>
+          <p:cNvPr id="14" name="Text 12"/>
+          <p:cNvSpPr/>
+          <p:nvPr/>
+        </p:nvSpPr>
+        <p:spPr>
+          <a:xfrm>
+            <a:off x="1463040" y="3813048"/>
+            <a:ext cx="3291840" cy="365760"/>
+          </a:xfrm>
+          <a:prstGeom prst="rect">
+            <a:avLst/>
+          </a:prstGeom>
+          <a:noFill/>
+          <a:ln/>
+        </p:spPr>
+        <p:txBody>
+          <a:bodyPr wrap="square" rtlCol="0" anchor="ctr"/>
+          <a:lstStyle/>
+          <a:p>
+            <a:pPr indent="0" marL="0">
+              <a:buNone/>
+            </a:pPr>
+            <a:r>
+              <a:rPr lang="en-US" sz="1600" b="1" dirty="0">
+                <a:solidFill>
+                  <a:srgbClr val="3A2E29"/>
+                </a:solidFill>
+                <a:latin typeface="Trebuchet MS" pitchFamily="34" charset="0"/>
+                <a:ea typeface="Trebuchet MS" pitchFamily="34" charset="-122"/>
+                <a:cs typeface="Trebuchet MS" pitchFamily="34" charset="-120"/>
+              </a:rPr>
+              <a:t>Domain &amp; server</a:t>
+            </a:r>
+            <a:endParaRPr lang="en-US" sz="1600" dirty="0"/>
+          </a:p>
+        </p:txBody>
+      </p:sp>
+      <p:sp>
+        <p:nvSpPr>
+          <p:cNvPr id="15" name="Text 13"/>
+          <p:cNvSpPr/>
+          <p:nvPr/>
+        </p:nvSpPr>
+        <p:spPr>
+          <a:xfrm>
+            <a:off x="4846320" y="3858768"/>
+            <a:ext cx="6583680" cy="777240"/>
           </a:xfrm>
           <a:prstGeom prst="rect">
             <a:avLst/>
@@ -3093,7 +3359,7 @@
                 <a:ea typeface="Calibri" pitchFamily="34" charset="-122"/>
                 <a:cs typeface="Calibri" pitchFamily="34" charset="-120"/>
               </a:rPr>
-              <a:t>Auto-replies, follow-ups, broadcasts to parents</a:t>
+              <a:t>We set up and configure your domain and server — handled for you</a:t>
             </a:r>
             <a:endParaRPr lang="en-US" dirty="0"/>
           </a:p>
@@ -3101,14 +3367,78 @@
       </p:sp>
       <p:sp>
         <p:nvSpPr>
-          <p:cNvPr id="11" name="Text 9"/>
-          <p:cNvSpPr/>
-          <p:nvPr/>
-        </p:nvSpPr>
-        <p:spPr>
-          <a:xfrm>
-            <a:off x="6492240" y="3154680"/>
-            <a:ext cx="4480560" cy="457200"/>
+          <p:cNvPr id="16" name="Shape 14"/>
+          <p:cNvSpPr/>
+          <p:nvPr/>
+        </p:nvSpPr>
+        <p:spPr>
+          <a:xfrm>
+            <a:off x="822960" y="4800600"/>
+            <a:ext cx="457200" cy="457200"/>
+          </a:xfrm>
+          <a:prstGeom prst="oval">
+            <a:avLst/>
+          </a:prstGeom>
+          <a:solidFill>
+            <a:srgbClr val="2EC4B6"/>
+          </a:solidFill>
+          <a:ln w="12700">
+            <a:solidFill>
+              <a:srgbClr val="2EC4B6"/>
+            </a:solidFill>
+            <a:prstDash val="solid"/>
+          </a:ln>
+        </p:spPr>
+      </p:sp>
+      <p:sp>
+        <p:nvSpPr>
+          <p:cNvPr id="17" name="Text 15"/>
+          <p:cNvSpPr/>
+          <p:nvPr/>
+        </p:nvSpPr>
+        <p:spPr>
+          <a:xfrm>
+            <a:off x="822960" y="4800600"/>
+            <a:ext cx="457200" cy="457200"/>
+          </a:xfrm>
+          <a:prstGeom prst="rect">
+            <a:avLst/>
+          </a:prstGeom>
+          <a:noFill/>
+          <a:ln/>
+        </p:spPr>
+        <p:txBody>
+          <a:bodyPr wrap="square" rtlCol="0" anchor="ctr"/>
+          <a:lstStyle/>
+          <a:p>
+            <a:pPr algn="ctr" indent="0" marL="0">
+              <a:buNone/>
+            </a:pPr>
+            <a:r>
+              <a:rPr lang="en-US" sz="1600" b="1" dirty="0">
+                <a:solidFill>
+                  <a:srgbClr val="FFFFFF"/>
+                </a:solidFill>
+                <a:latin typeface="Trebuchet MS" pitchFamily="34" charset="0"/>
+                <a:ea typeface="Trebuchet MS" pitchFamily="34" charset="-122"/>
+                <a:cs typeface="Trebuchet MS" pitchFamily="34" charset="-120"/>
+              </a:rPr>
+              <a:t>4</a:t>
+            </a:r>
+            <a:endParaRPr lang="en-US" sz="1600" dirty="0"/>
+          </a:p>
+        </p:txBody>
+      </p:sp>
+      <p:sp>
+        <p:nvSpPr>
+          <p:cNvPr id="18" name="Text 16"/>
+          <p:cNvSpPr/>
+          <p:nvPr/>
+        </p:nvSpPr>
+        <p:spPr>
+          <a:xfrm>
+            <a:off x="1463040" y="4773168"/>
+            <a:ext cx="3291840" cy="365760"/>
           </a:xfrm>
           <a:prstGeom prst="rect">
             <a:avLst/>
@@ -3124,7 +3454,46 @@
               <a:buNone/>
             </a:pPr>
             <a:r>
-              <a:rPr lang="en-US" i="1" dirty="0">
+              <a:rPr lang="en-US" sz="1600" b="1" dirty="0">
+                <a:solidFill>
+                  <a:srgbClr val="3A2E29"/>
+                </a:solidFill>
+                <a:latin typeface="Trebuchet MS" pitchFamily="34" charset="0"/>
+                <a:ea typeface="Trebuchet MS" pitchFamily="34" charset="-122"/>
+                <a:cs typeface="Trebuchet MS" pitchFamily="34" charset="-120"/>
+              </a:rPr>
+              <a:t>Start checklist</a:t>
+            </a:r>
+            <a:endParaRPr lang="en-US" sz="1600" dirty="0"/>
+          </a:p>
+        </p:txBody>
+      </p:sp>
+      <p:sp>
+        <p:nvSpPr>
+          <p:cNvPr id="19" name="Text 17"/>
+          <p:cNvSpPr/>
+          <p:nvPr/>
+        </p:nvSpPr>
+        <p:spPr>
+          <a:xfrm>
+            <a:off x="4846320" y="4818888"/>
+            <a:ext cx="6583680" cy="777240"/>
+          </a:xfrm>
+          <a:prstGeom prst="rect">
+            <a:avLst/>
+          </a:prstGeom>
+          <a:noFill/>
+          <a:ln/>
+        </p:spPr>
+        <p:txBody>
+          <a:bodyPr wrap="square" rtlCol="0" anchor="ctr"/>
+          <a:lstStyle/>
+          <a:p>
+            <a:pPr indent="0" marL="0">
+              <a:buNone/>
+            </a:pPr>
+            <a:r>
+              <a:rPr lang="en-US" dirty="0">
                 <a:solidFill>
                   <a:srgbClr val="725A4A"/>
                 </a:solidFill>
@@ -3132,7 +3501,7 @@
                 <a:ea typeface="Calibri" pitchFamily="34" charset="-122"/>
                 <a:cs typeface="Calibri" pitchFamily="34" charset="-120"/>
               </a:rPr>
-              <a:t>Systematised communication</a:t>
+              <a:t>Name, logo, photos, basic text, contact details, preferred domain — we walk you through it</a:t>
             </a:r>
             <a:endParaRPr lang="en-US" dirty="0"/>
           </a:p>
@@ -3140,302 +3509,14 @@
       </p:sp>
       <p:sp>
         <p:nvSpPr>
-          <p:cNvPr id="12" name="Shape 10"/>
-          <p:cNvSpPr/>
-          <p:nvPr/>
-        </p:nvSpPr>
-        <p:spPr>
-          <a:xfrm>
-            <a:off x="731520" y="4069080"/>
-            <a:ext cx="5212080" cy="2011680"/>
-          </a:xfrm>
-          <a:prstGeom prst="roundRect">
-            <a:avLst>
-              <a:gd name="adj" fmla="val 11364"/>
-            </a:avLst>
-          </a:prstGeom>
-          <a:solidFill>
-            <a:srgbClr val="F3EDFB"/>
-          </a:solidFill>
-          <a:ln w="12700">
-            <a:solidFill>
-              <a:srgbClr val="6F2DBD"/>
-            </a:solidFill>
-            <a:prstDash val="solid"/>
-          </a:ln>
-        </p:spPr>
-      </p:sp>
-      <p:sp>
-        <p:nvSpPr>
-          <p:cNvPr id="13" name="Text 11"/>
-          <p:cNvSpPr/>
-          <p:nvPr/>
-        </p:nvSpPr>
-        <p:spPr>
-          <a:xfrm>
-            <a:off x="1005840" y="4297680"/>
-            <a:ext cx="4206240" cy="457200"/>
-          </a:xfrm>
-          <a:prstGeom prst="rect">
-            <a:avLst/>
-          </a:prstGeom>
-          <a:noFill/>
-          <a:ln/>
-        </p:spPr>
-        <p:txBody>
-          <a:bodyPr wrap="square" rtlCol="0" anchor="ctr"/>
-          <a:lstStyle/>
-          <a:p>
-            <a:pPr indent="0" marL="0">
-              <a:buNone/>
-            </a:pPr>
-            <a:r>
-              <a:rPr lang="en-US" sz="1700" b="1" dirty="0">
-                <a:solidFill>
-                  <a:srgbClr val="6F2DBD"/>
-                </a:solidFill>
-                <a:latin typeface="Trebuchet MS" pitchFamily="34" charset="0"/>
-                <a:ea typeface="Trebuchet MS" pitchFamily="34" charset="-122"/>
-                <a:cs typeface="Trebuchet MS" pitchFamily="34" charset="-120"/>
-              </a:rPr>
-              <a:t>Admission portal</a:t>
-            </a:r>
-            <a:endParaRPr lang="en-US" sz="1700" dirty="0"/>
-          </a:p>
-        </p:txBody>
-      </p:sp>
-      <p:sp>
-        <p:nvSpPr>
-          <p:cNvPr id="14" name="Text 12"/>
-          <p:cNvSpPr/>
-          <p:nvPr/>
-        </p:nvSpPr>
-        <p:spPr>
-          <a:xfrm>
-            <a:off x="1005840" y="4800600"/>
-            <a:ext cx="4480560" cy="640080"/>
-          </a:xfrm>
-          <a:prstGeom prst="rect">
-            <a:avLst/>
-          </a:prstGeom>
-          <a:noFill/>
-          <a:ln/>
-        </p:spPr>
-        <p:txBody>
-          <a:bodyPr wrap="square" rtlCol="0" anchor="ctr"/>
-          <a:lstStyle/>
-          <a:p>
-            <a:pPr indent="0" marL="0">
-              <a:buNone/>
-            </a:pPr>
-            <a:r>
-              <a:rPr lang="en-US" dirty="0">
-                <a:solidFill>
-                  <a:srgbClr val="725A4A"/>
-                </a:solidFill>
-                <a:latin typeface="Calibri" pitchFamily="34" charset="0"/>
-                <a:ea typeface="Calibri" pitchFamily="34" charset="-122"/>
-                <a:cs typeface="Calibri" pitchFamily="34" charset="-120"/>
-              </a:rPr>
-              <a:t>Online application + enquiry tracking</a:t>
-            </a:r>
-            <a:endParaRPr lang="en-US" dirty="0"/>
-          </a:p>
-        </p:txBody>
-      </p:sp>
-      <p:sp>
-        <p:nvSpPr>
-          <p:cNvPr id="15" name="Text 13"/>
-          <p:cNvSpPr/>
-          <p:nvPr/>
-        </p:nvSpPr>
-        <p:spPr>
-          <a:xfrm>
-            <a:off x="1005840" y="5440680"/>
-            <a:ext cx="4480560" cy="457200"/>
-          </a:xfrm>
-          <a:prstGeom prst="rect">
-            <a:avLst/>
-          </a:prstGeom>
-          <a:noFill/>
-          <a:ln/>
-        </p:spPr>
-        <p:txBody>
-          <a:bodyPr wrap="square" rtlCol="0" anchor="ctr"/>
-          <a:lstStyle/>
-          <a:p>
-            <a:pPr indent="0" marL="0">
-              <a:buNone/>
-            </a:pPr>
-            <a:r>
-              <a:rPr lang="en-US" i="1" dirty="0">
-                <a:solidFill>
-                  <a:srgbClr val="725A4A"/>
-                </a:solidFill>
-                <a:latin typeface="Calibri" pitchFamily="34" charset="0"/>
-                <a:ea typeface="Calibri" pitchFamily="34" charset="-122"/>
-                <a:cs typeface="Calibri" pitchFamily="34" charset="-120"/>
-              </a:rPr>
-              <a:t>Digital admissions</a:t>
-            </a:r>
-            <a:endParaRPr lang="en-US" dirty="0"/>
-          </a:p>
-        </p:txBody>
-      </p:sp>
-      <p:sp>
-        <p:nvSpPr>
-          <p:cNvPr id="16" name="Shape 14"/>
-          <p:cNvSpPr/>
-          <p:nvPr/>
-        </p:nvSpPr>
-        <p:spPr>
-          <a:xfrm>
-            <a:off x="6217920" y="4069080"/>
-            <a:ext cx="5212080" cy="2011680"/>
-          </a:xfrm>
-          <a:prstGeom prst="roundRect">
-            <a:avLst>
-              <a:gd name="adj" fmla="val 11364"/>
-            </a:avLst>
-          </a:prstGeom>
-          <a:solidFill>
-            <a:srgbClr val="F3EDFB"/>
-          </a:solidFill>
-          <a:ln w="12700">
-            <a:solidFill>
-              <a:srgbClr val="6F2DBD"/>
-            </a:solidFill>
-            <a:prstDash val="solid"/>
-          </a:ln>
-        </p:spPr>
-      </p:sp>
-      <p:sp>
-        <p:nvSpPr>
-          <p:cNvPr id="17" name="Text 15"/>
-          <p:cNvSpPr/>
-          <p:nvPr/>
-        </p:nvSpPr>
-        <p:spPr>
-          <a:xfrm>
-            <a:off x="6492240" y="4297680"/>
-            <a:ext cx="4206240" cy="457200"/>
-          </a:xfrm>
-          <a:prstGeom prst="rect">
-            <a:avLst/>
-          </a:prstGeom>
-          <a:noFill/>
-          <a:ln/>
-        </p:spPr>
-        <p:txBody>
-          <a:bodyPr wrap="square" rtlCol="0" anchor="ctr"/>
-          <a:lstStyle/>
-          <a:p>
-            <a:pPr indent="0" marL="0">
-              <a:buNone/>
-            </a:pPr>
-            <a:r>
-              <a:rPr lang="en-US" sz="1700" b="1" dirty="0">
-                <a:solidFill>
-                  <a:srgbClr val="6F2DBD"/>
-                </a:solidFill>
-                <a:latin typeface="Trebuchet MS" pitchFamily="34" charset="0"/>
-                <a:ea typeface="Trebuchet MS" pitchFamily="34" charset="-122"/>
-                <a:cs typeface="Trebuchet MS" pitchFamily="34" charset="-120"/>
-              </a:rPr>
-              <a:t>School database</a:t>
-            </a:r>
-            <a:endParaRPr lang="en-US" sz="1700" dirty="0"/>
-          </a:p>
-        </p:txBody>
-      </p:sp>
-      <p:sp>
-        <p:nvSpPr>
-          <p:cNvPr id="18" name="Text 16"/>
-          <p:cNvSpPr/>
-          <p:nvPr/>
-        </p:nvSpPr>
-        <p:spPr>
-          <a:xfrm>
-            <a:off x="6492240" y="4800600"/>
-            <a:ext cx="4480560" cy="640080"/>
-          </a:xfrm>
-          <a:prstGeom prst="rect">
-            <a:avLst/>
-          </a:prstGeom>
-          <a:noFill/>
-          <a:ln/>
-        </p:spPr>
-        <p:txBody>
-          <a:bodyPr wrap="square" rtlCol="0" anchor="ctr"/>
-          <a:lstStyle/>
-          <a:p>
-            <a:pPr indent="0" marL="0">
-              <a:buNone/>
-            </a:pPr>
-            <a:r>
-              <a:rPr lang="en-US" dirty="0">
-                <a:solidFill>
-                  <a:srgbClr val="725A4A"/>
-                </a:solidFill>
-                <a:latin typeface="Calibri" pitchFamily="34" charset="0"/>
-                <a:ea typeface="Calibri" pitchFamily="34" charset="-122"/>
-                <a:cs typeface="Calibri" pitchFamily="34" charset="-120"/>
-              </a:rPr>
-              <a:t>Student records, staff, attendance base</a:t>
-            </a:r>
-            <a:endParaRPr lang="en-US" dirty="0"/>
-          </a:p>
-        </p:txBody>
-      </p:sp>
-      <p:sp>
-        <p:nvSpPr>
-          <p:cNvPr id="19" name="Text 17"/>
-          <p:cNvSpPr/>
-          <p:nvPr/>
-        </p:nvSpPr>
-        <p:spPr>
-          <a:xfrm>
-            <a:off x="6492240" y="5440680"/>
-            <a:ext cx="4480560" cy="457200"/>
-          </a:xfrm>
-          <a:prstGeom prst="rect">
-            <a:avLst/>
-          </a:prstGeom>
-          <a:noFill/>
-          <a:ln/>
-        </p:spPr>
-        <p:txBody>
-          <a:bodyPr wrap="square" rtlCol="0" anchor="ctr"/>
-          <a:lstStyle/>
-          <a:p>
-            <a:pPr indent="0" marL="0">
-              <a:buNone/>
-            </a:pPr>
-            <a:r>
-              <a:rPr lang="en-US" i="1" dirty="0">
-                <a:solidFill>
-                  <a:srgbClr val="725A4A"/>
-                </a:solidFill>
-                <a:latin typeface="Calibri" pitchFamily="34" charset="0"/>
-                <a:ea typeface="Calibri" pitchFamily="34" charset="-122"/>
-                <a:cs typeface="Calibri" pitchFamily="34" charset="-120"/>
-              </a:rPr>
-              <a:t>Data organised</a:t>
-            </a:r>
-            <a:endParaRPr lang="en-US" dirty="0"/>
-          </a:p>
-        </p:txBody>
-      </p:sp>
-      <p:sp>
-        <p:nvSpPr>
           <p:cNvPr id="20" name="Shape 18"/>
           <p:cNvSpPr/>
           <p:nvPr/>
         </p:nvSpPr>
         <p:spPr>
           <a:xfrm>
-            <a:off x="731520" y="5852160"/>
-            <a:ext cx="10698480" cy="640080"/>
+            <a:off x="822960" y="5989320"/>
+            <a:ext cx="10515600" cy="640080"/>
           </a:xfrm>
           <a:prstGeom prst="roundRect">
             <a:avLst>
@@ -3461,8 +3542,8 @@
         </p:nvSpPr>
         <p:spPr>
           <a:xfrm>
-            <a:off x="731520" y="5852160"/>
-            <a:ext cx="10698480" cy="640080"/>
+            <a:off x="822960" y="5989320"/>
+            <a:ext cx="10515600" cy="640080"/>
           </a:xfrm>
           <a:prstGeom prst="rect">
             <a:avLst/>
@@ -3486,7 +3567,7 @@
                 <a:ea typeface="Calibri" pitchFamily="34" charset="-122"/>
                 <a:cs typeface="Calibri" pitchFamily="34" charset="-120"/>
               </a:rPr>
-              <a:t>Add-on pricing is simple and low: every add-on is Rs 1,000 or below per month.</a:t>
+              <a:t>Main promise: you hand us your school, we deliver a ready-to-use website with its complete visual kit.</a:t>
             </a:r>
             <a:endParaRPr lang="en-US" sz="1400" dirty="0"/>
           </a:p>
@@ -3503,6 +3584,758 @@
 <file path=ppt/slides/slide4.xml><?xml version="1.0" encoding="utf-8"?>
 <p:sld xmlns:a="http://schemas.openxmlformats.org/drawingml/2006/main" xmlns:r="http://schemas.openxmlformats.org/officeDocument/2006/relationships" xmlns:p="http://schemas.openxmlformats.org/presentationml/2006/main">
   <p:cSld name="Slide 4">
+    <p:bg>
+      <p:bgPr>
+        <a:solidFill>
+          <a:srgbClr val="FFFFFF"/>
+        </a:solidFill>
+      </p:bgPr>
+    </p:bg>
+    <p:spTree>
+      <p:nvGrpSpPr>
+        <p:cNvPr id="1" name=""/>
+        <p:cNvGrpSpPr/>
+        <p:nvPr/>
+      </p:nvGrpSpPr>
+      <p:grpSpPr>
+        <a:xfrm>
+          <a:off x="0" y="0"/>
+          <a:ext cx="0" cy="0"/>
+          <a:chOff x="0" y="0"/>
+          <a:chExt cx="0" cy="0"/>
+        </a:xfrm>
+      </p:grpSpPr>
+      <p:sp>
+        <p:nvSpPr>
+          <p:cNvPr id="2" name="Text 0"/>
+          <p:cNvSpPr/>
+          <p:nvPr/>
+        </p:nvSpPr>
+        <p:spPr>
+          <a:xfrm>
+            <a:off x="731520" y="457200"/>
+            <a:ext cx="7315200" cy="731520"/>
+          </a:xfrm>
+          <a:prstGeom prst="rect">
+            <a:avLst/>
+          </a:prstGeom>
+          <a:noFill/>
+          <a:ln/>
+        </p:spPr>
+        <p:txBody>
+          <a:bodyPr wrap="square" rtlCol="0" anchor="ctr"/>
+          <a:lstStyle/>
+          <a:p>
+            <a:pPr indent="0" marL="0">
+              <a:buNone/>
+            </a:pPr>
+            <a:r>
+              <a:rPr lang="en-US" sz="3000" b="1" dirty="0">
+                <a:solidFill>
+                  <a:srgbClr val="6F2DBD"/>
+                </a:solidFill>
+                <a:latin typeface="Trebuchet MS" pitchFamily="34" charset="0"/>
+                <a:ea typeface="Trebuchet MS" pitchFamily="34" charset="-122"/>
+                <a:cs typeface="Trebuchet MS" pitchFamily="34" charset="-120"/>
+              </a:rPr>
+              <a:t>Optional add-ons</a:t>
+            </a:r>
+            <a:endParaRPr lang="en-US" sz="3000" dirty="0"/>
+          </a:p>
+        </p:txBody>
+      </p:sp>
+      <p:sp>
+        <p:nvSpPr>
+          <p:cNvPr id="3" name="Text 1"/>
+          <p:cNvSpPr/>
+          <p:nvPr/>
+        </p:nvSpPr>
+        <p:spPr>
+          <a:xfrm>
+            <a:off x="731520" y="1188720"/>
+            <a:ext cx="8595360" cy="457200"/>
+          </a:xfrm>
+          <a:prstGeom prst="rect">
+            <a:avLst/>
+          </a:prstGeom>
+          <a:noFill/>
+          <a:ln/>
+        </p:spPr>
+        <p:txBody>
+          <a:bodyPr wrap="square" rtlCol="0" anchor="ctr"/>
+          <a:lstStyle/>
+          <a:p>
+            <a:pPr indent="0" marL="0">
+              <a:buNone/>
+            </a:pPr>
+            <a:r>
+              <a:rPr lang="en-US" dirty="0">
+                <a:solidFill>
+                  <a:srgbClr val="725A4A"/>
+                </a:solidFill>
+                <a:latin typeface="Calibri" pitchFamily="34" charset="0"/>
+                <a:ea typeface="Calibri" pitchFamily="34" charset="-122"/>
+                <a:cs typeface="Calibri" pitchFamily="34" charset="-120"/>
+              </a:rPr>
+              <a:t>Make your website grow with your school — add what you need, when you need it</a:t>
+            </a:r>
+            <a:endParaRPr lang="en-US" dirty="0"/>
+          </a:p>
+        </p:txBody>
+      </p:sp>
+      <p:sp>
+        <p:nvSpPr>
+          <p:cNvPr id="4" name="Shape 2"/>
+          <p:cNvSpPr/>
+          <p:nvPr/>
+        </p:nvSpPr>
+        <p:spPr>
+          <a:xfrm>
+            <a:off x="731520" y="1783080"/>
+            <a:ext cx="5212080" cy="2011680"/>
+          </a:xfrm>
+          <a:prstGeom prst="roundRect">
+            <a:avLst>
+              <a:gd name="adj" fmla="val 11364"/>
+            </a:avLst>
+          </a:prstGeom>
+          <a:solidFill>
+            <a:srgbClr val="F3EDFB"/>
+          </a:solidFill>
+          <a:ln w="12700">
+            <a:solidFill>
+              <a:srgbClr val="6F2DBD"/>
+            </a:solidFill>
+            <a:prstDash val="solid"/>
+          </a:ln>
+        </p:spPr>
+      </p:sp>
+      <p:sp>
+        <p:nvSpPr>
+          <p:cNvPr id="5" name="Text 3"/>
+          <p:cNvSpPr/>
+          <p:nvPr/>
+        </p:nvSpPr>
+        <p:spPr>
+          <a:xfrm>
+            <a:off x="1005840" y="2011680"/>
+            <a:ext cx="4206240" cy="457200"/>
+          </a:xfrm>
+          <a:prstGeom prst="rect">
+            <a:avLst/>
+          </a:prstGeom>
+          <a:noFill/>
+          <a:ln/>
+        </p:spPr>
+        <p:txBody>
+          <a:bodyPr wrap="square" rtlCol="0" anchor="ctr"/>
+          <a:lstStyle/>
+          <a:p>
+            <a:pPr indent="0" marL="0">
+              <a:buNone/>
+            </a:pPr>
+            <a:r>
+              <a:rPr lang="en-US" sz="1700" b="1" dirty="0">
+                <a:solidFill>
+                  <a:srgbClr val="6F2DBD"/>
+                </a:solidFill>
+                <a:latin typeface="Trebuchet MS" pitchFamily="34" charset="0"/>
+                <a:ea typeface="Trebuchet MS" pitchFamily="34" charset="-122"/>
+                <a:cs typeface="Trebuchet MS" pitchFamily="34" charset="-120"/>
+              </a:rPr>
+              <a:t>Google Ads</a:t>
+            </a:r>
+            <a:endParaRPr lang="en-US" sz="1700" dirty="0"/>
+          </a:p>
+        </p:txBody>
+      </p:sp>
+      <p:sp>
+        <p:nvSpPr>
+          <p:cNvPr id="6" name="Text 4"/>
+          <p:cNvSpPr/>
+          <p:nvPr/>
+        </p:nvSpPr>
+        <p:spPr>
+          <a:xfrm>
+            <a:off x="1005840" y="2514600"/>
+            <a:ext cx="4480560" cy="640080"/>
+          </a:xfrm>
+          <a:prstGeom prst="rect">
+            <a:avLst/>
+          </a:prstGeom>
+          <a:noFill/>
+          <a:ln/>
+        </p:spPr>
+        <p:txBody>
+          <a:bodyPr wrap="square" rtlCol="0" anchor="ctr"/>
+          <a:lstStyle/>
+          <a:p>
+            <a:pPr indent="0" marL="0">
+              <a:buNone/>
+            </a:pPr>
+            <a:r>
+              <a:rPr lang="en-US" dirty="0">
+                <a:solidFill>
+                  <a:srgbClr val="725A4A"/>
+                </a:solidFill>
+                <a:latin typeface="Calibri" pitchFamily="34" charset="0"/>
+                <a:ea typeface="Calibri" pitchFamily="34" charset="-122"/>
+                <a:cs typeface="Calibri" pitchFamily="34" charset="-120"/>
+              </a:rPr>
+              <a:t>Managed monthly campaign</a:t>
+            </a:r>
+            <a:endParaRPr lang="en-US" dirty="0"/>
+          </a:p>
+        </p:txBody>
+      </p:sp>
+      <p:sp>
+        <p:nvSpPr>
+          <p:cNvPr id="7" name="Text 5"/>
+          <p:cNvSpPr/>
+          <p:nvPr/>
+        </p:nvSpPr>
+        <p:spPr>
+          <a:xfrm>
+            <a:off x="1005840" y="3154680"/>
+            <a:ext cx="4480560" cy="457200"/>
+          </a:xfrm>
+          <a:prstGeom prst="rect">
+            <a:avLst/>
+          </a:prstGeom>
+          <a:noFill/>
+          <a:ln/>
+        </p:spPr>
+        <p:txBody>
+          <a:bodyPr wrap="square" rtlCol="0" anchor="ctr"/>
+          <a:lstStyle/>
+          <a:p>
+            <a:pPr indent="0" marL="0">
+              <a:buNone/>
+            </a:pPr>
+            <a:r>
+              <a:rPr lang="en-US" i="1" dirty="0">
+                <a:solidFill>
+                  <a:srgbClr val="725A4A"/>
+                </a:solidFill>
+                <a:latin typeface="Calibri" pitchFamily="34" charset="0"/>
+                <a:ea typeface="Calibri" pitchFamily="34" charset="-122"/>
+                <a:cs typeface="Calibri" pitchFamily="34" charset="-120"/>
+              </a:rPr>
+              <a:t>Ad management (setup + running)</a:t>
+            </a:r>
+            <a:endParaRPr lang="en-US" dirty="0"/>
+          </a:p>
+        </p:txBody>
+      </p:sp>
+      <p:sp>
+        <p:nvSpPr>
+          <p:cNvPr id="8" name="Shape 6"/>
+          <p:cNvSpPr/>
+          <p:nvPr/>
+        </p:nvSpPr>
+        <p:spPr>
+          <a:xfrm>
+            <a:off x="6217920" y="1783080"/>
+            <a:ext cx="5212080" cy="2011680"/>
+          </a:xfrm>
+          <a:prstGeom prst="roundRect">
+            <a:avLst>
+              <a:gd name="adj" fmla="val 11364"/>
+            </a:avLst>
+          </a:prstGeom>
+          <a:solidFill>
+            <a:srgbClr val="F3EDFB"/>
+          </a:solidFill>
+          <a:ln w="12700">
+            <a:solidFill>
+              <a:srgbClr val="6F2DBD"/>
+            </a:solidFill>
+            <a:prstDash val="solid"/>
+          </a:ln>
+        </p:spPr>
+      </p:sp>
+      <p:sp>
+        <p:nvSpPr>
+          <p:cNvPr id="9" name="Text 7"/>
+          <p:cNvSpPr/>
+          <p:nvPr/>
+        </p:nvSpPr>
+        <p:spPr>
+          <a:xfrm>
+            <a:off x="6492240" y="2011680"/>
+            <a:ext cx="4206240" cy="457200"/>
+          </a:xfrm>
+          <a:prstGeom prst="rect">
+            <a:avLst/>
+          </a:prstGeom>
+          <a:noFill/>
+          <a:ln/>
+        </p:spPr>
+        <p:txBody>
+          <a:bodyPr wrap="square" rtlCol="0" anchor="ctr"/>
+          <a:lstStyle/>
+          <a:p>
+            <a:pPr indent="0" marL="0">
+              <a:buNone/>
+            </a:pPr>
+            <a:r>
+              <a:rPr lang="en-US" sz="1700" b="1" dirty="0">
+                <a:solidFill>
+                  <a:srgbClr val="6F2DBD"/>
+                </a:solidFill>
+                <a:latin typeface="Trebuchet MS" pitchFamily="34" charset="0"/>
+                <a:ea typeface="Trebuchet MS" pitchFamily="34" charset="-122"/>
+                <a:cs typeface="Trebuchet MS" pitchFamily="34" charset="-120"/>
+              </a:rPr>
+              <a:t>WhatsApp automation</a:t>
+            </a:r>
+            <a:endParaRPr lang="en-US" sz="1700" dirty="0"/>
+          </a:p>
+        </p:txBody>
+      </p:sp>
+      <p:sp>
+        <p:nvSpPr>
+          <p:cNvPr id="10" name="Text 8"/>
+          <p:cNvSpPr/>
+          <p:nvPr/>
+        </p:nvSpPr>
+        <p:spPr>
+          <a:xfrm>
+            <a:off x="6492240" y="2514600"/>
+            <a:ext cx="4480560" cy="640080"/>
+          </a:xfrm>
+          <a:prstGeom prst="rect">
+            <a:avLst/>
+          </a:prstGeom>
+          <a:noFill/>
+          <a:ln/>
+        </p:spPr>
+        <p:txBody>
+          <a:bodyPr wrap="square" rtlCol="0" anchor="ctr"/>
+          <a:lstStyle/>
+          <a:p>
+            <a:pPr indent="0" marL="0">
+              <a:buNone/>
+            </a:pPr>
+            <a:r>
+              <a:rPr lang="en-US" dirty="0">
+                <a:solidFill>
+                  <a:srgbClr val="725A4A"/>
+                </a:solidFill>
+                <a:latin typeface="Calibri" pitchFamily="34" charset="0"/>
+                <a:ea typeface="Calibri" pitchFamily="34" charset="-122"/>
+                <a:cs typeface="Calibri" pitchFamily="34" charset="-120"/>
+              </a:rPr>
+              <a:t>Auto-replies, follow-ups, broadcasts to parents</a:t>
+            </a:r>
+            <a:endParaRPr lang="en-US" dirty="0"/>
+          </a:p>
+        </p:txBody>
+      </p:sp>
+      <p:sp>
+        <p:nvSpPr>
+          <p:cNvPr id="11" name="Text 9"/>
+          <p:cNvSpPr/>
+          <p:nvPr/>
+        </p:nvSpPr>
+        <p:spPr>
+          <a:xfrm>
+            <a:off x="6492240" y="3154680"/>
+            <a:ext cx="4480560" cy="457200"/>
+          </a:xfrm>
+          <a:prstGeom prst="rect">
+            <a:avLst/>
+          </a:prstGeom>
+          <a:noFill/>
+          <a:ln/>
+        </p:spPr>
+        <p:txBody>
+          <a:bodyPr wrap="square" rtlCol="0" anchor="ctr"/>
+          <a:lstStyle/>
+          <a:p>
+            <a:pPr indent="0" marL="0">
+              <a:buNone/>
+            </a:pPr>
+            <a:r>
+              <a:rPr lang="en-US" i="1" dirty="0">
+                <a:solidFill>
+                  <a:srgbClr val="725A4A"/>
+                </a:solidFill>
+                <a:latin typeface="Calibri" pitchFamily="34" charset="0"/>
+                <a:ea typeface="Calibri" pitchFamily="34" charset="-122"/>
+                <a:cs typeface="Calibri" pitchFamily="34" charset="-120"/>
+              </a:rPr>
+              <a:t>Systematised communication</a:t>
+            </a:r>
+            <a:endParaRPr lang="en-US" dirty="0"/>
+          </a:p>
+        </p:txBody>
+      </p:sp>
+      <p:sp>
+        <p:nvSpPr>
+          <p:cNvPr id="12" name="Shape 10"/>
+          <p:cNvSpPr/>
+          <p:nvPr/>
+        </p:nvSpPr>
+        <p:spPr>
+          <a:xfrm>
+            <a:off x="731520" y="4069080"/>
+            <a:ext cx="5212080" cy="2011680"/>
+          </a:xfrm>
+          <a:prstGeom prst="roundRect">
+            <a:avLst>
+              <a:gd name="adj" fmla="val 11364"/>
+            </a:avLst>
+          </a:prstGeom>
+          <a:solidFill>
+            <a:srgbClr val="F3EDFB"/>
+          </a:solidFill>
+          <a:ln w="12700">
+            <a:solidFill>
+              <a:srgbClr val="6F2DBD"/>
+            </a:solidFill>
+            <a:prstDash val="solid"/>
+          </a:ln>
+        </p:spPr>
+      </p:sp>
+      <p:sp>
+        <p:nvSpPr>
+          <p:cNvPr id="13" name="Text 11"/>
+          <p:cNvSpPr/>
+          <p:nvPr/>
+        </p:nvSpPr>
+        <p:spPr>
+          <a:xfrm>
+            <a:off x="1005840" y="4297680"/>
+            <a:ext cx="4206240" cy="457200"/>
+          </a:xfrm>
+          <a:prstGeom prst="rect">
+            <a:avLst/>
+          </a:prstGeom>
+          <a:noFill/>
+          <a:ln/>
+        </p:spPr>
+        <p:txBody>
+          <a:bodyPr wrap="square" rtlCol="0" anchor="ctr"/>
+          <a:lstStyle/>
+          <a:p>
+            <a:pPr indent="0" marL="0">
+              <a:buNone/>
+            </a:pPr>
+            <a:r>
+              <a:rPr lang="en-US" sz="1700" b="1" dirty="0">
+                <a:solidFill>
+                  <a:srgbClr val="6F2DBD"/>
+                </a:solidFill>
+                <a:latin typeface="Trebuchet MS" pitchFamily="34" charset="0"/>
+                <a:ea typeface="Trebuchet MS" pitchFamily="34" charset="-122"/>
+                <a:cs typeface="Trebuchet MS" pitchFamily="34" charset="-120"/>
+              </a:rPr>
+              <a:t>Admission portal</a:t>
+            </a:r>
+            <a:endParaRPr lang="en-US" sz="1700" dirty="0"/>
+          </a:p>
+        </p:txBody>
+      </p:sp>
+      <p:sp>
+        <p:nvSpPr>
+          <p:cNvPr id="14" name="Text 12"/>
+          <p:cNvSpPr/>
+          <p:nvPr/>
+        </p:nvSpPr>
+        <p:spPr>
+          <a:xfrm>
+            <a:off x="1005840" y="4800600"/>
+            <a:ext cx="4480560" cy="640080"/>
+          </a:xfrm>
+          <a:prstGeom prst="rect">
+            <a:avLst/>
+          </a:prstGeom>
+          <a:noFill/>
+          <a:ln/>
+        </p:spPr>
+        <p:txBody>
+          <a:bodyPr wrap="square" rtlCol="0" anchor="ctr"/>
+          <a:lstStyle/>
+          <a:p>
+            <a:pPr indent="0" marL="0">
+              <a:buNone/>
+            </a:pPr>
+            <a:r>
+              <a:rPr lang="en-US" dirty="0">
+                <a:solidFill>
+                  <a:srgbClr val="725A4A"/>
+                </a:solidFill>
+                <a:latin typeface="Calibri" pitchFamily="34" charset="0"/>
+                <a:ea typeface="Calibri" pitchFamily="34" charset="-122"/>
+                <a:cs typeface="Calibri" pitchFamily="34" charset="-120"/>
+              </a:rPr>
+              <a:t>Online application + enquiry tracking</a:t>
+            </a:r>
+            <a:endParaRPr lang="en-US" dirty="0"/>
+          </a:p>
+        </p:txBody>
+      </p:sp>
+      <p:sp>
+        <p:nvSpPr>
+          <p:cNvPr id="15" name="Text 13"/>
+          <p:cNvSpPr/>
+          <p:nvPr/>
+        </p:nvSpPr>
+        <p:spPr>
+          <a:xfrm>
+            <a:off x="1005840" y="5440680"/>
+            <a:ext cx="4480560" cy="457200"/>
+          </a:xfrm>
+          <a:prstGeom prst="rect">
+            <a:avLst/>
+          </a:prstGeom>
+          <a:noFill/>
+          <a:ln/>
+        </p:spPr>
+        <p:txBody>
+          <a:bodyPr wrap="square" rtlCol="0" anchor="ctr"/>
+          <a:lstStyle/>
+          <a:p>
+            <a:pPr indent="0" marL="0">
+              <a:buNone/>
+            </a:pPr>
+            <a:r>
+              <a:rPr lang="en-US" i="1" dirty="0">
+                <a:solidFill>
+                  <a:srgbClr val="725A4A"/>
+                </a:solidFill>
+                <a:latin typeface="Calibri" pitchFamily="34" charset="0"/>
+                <a:ea typeface="Calibri" pitchFamily="34" charset="-122"/>
+                <a:cs typeface="Calibri" pitchFamily="34" charset="-120"/>
+              </a:rPr>
+              <a:t>Digital admissions</a:t>
+            </a:r>
+            <a:endParaRPr lang="en-US" dirty="0"/>
+          </a:p>
+        </p:txBody>
+      </p:sp>
+      <p:sp>
+        <p:nvSpPr>
+          <p:cNvPr id="16" name="Shape 14"/>
+          <p:cNvSpPr/>
+          <p:nvPr/>
+        </p:nvSpPr>
+        <p:spPr>
+          <a:xfrm>
+            <a:off x="6217920" y="4069080"/>
+            <a:ext cx="5212080" cy="2011680"/>
+          </a:xfrm>
+          <a:prstGeom prst="roundRect">
+            <a:avLst>
+              <a:gd name="adj" fmla="val 11364"/>
+            </a:avLst>
+          </a:prstGeom>
+          <a:solidFill>
+            <a:srgbClr val="F3EDFB"/>
+          </a:solidFill>
+          <a:ln w="12700">
+            <a:solidFill>
+              <a:srgbClr val="6F2DBD"/>
+            </a:solidFill>
+            <a:prstDash val="solid"/>
+          </a:ln>
+        </p:spPr>
+      </p:sp>
+      <p:sp>
+        <p:nvSpPr>
+          <p:cNvPr id="17" name="Text 15"/>
+          <p:cNvSpPr/>
+          <p:nvPr/>
+        </p:nvSpPr>
+        <p:spPr>
+          <a:xfrm>
+            <a:off x="6492240" y="4297680"/>
+            <a:ext cx="4206240" cy="457200"/>
+          </a:xfrm>
+          <a:prstGeom prst="rect">
+            <a:avLst/>
+          </a:prstGeom>
+          <a:noFill/>
+          <a:ln/>
+        </p:spPr>
+        <p:txBody>
+          <a:bodyPr wrap="square" rtlCol="0" anchor="ctr"/>
+          <a:lstStyle/>
+          <a:p>
+            <a:pPr indent="0" marL="0">
+              <a:buNone/>
+            </a:pPr>
+            <a:r>
+              <a:rPr lang="en-US" sz="1700" b="1" dirty="0">
+                <a:solidFill>
+                  <a:srgbClr val="6F2DBD"/>
+                </a:solidFill>
+                <a:latin typeface="Trebuchet MS" pitchFamily="34" charset="0"/>
+                <a:ea typeface="Trebuchet MS" pitchFamily="34" charset="-122"/>
+                <a:cs typeface="Trebuchet MS" pitchFamily="34" charset="-120"/>
+              </a:rPr>
+              <a:t>School database</a:t>
+            </a:r>
+            <a:endParaRPr lang="en-US" sz="1700" dirty="0"/>
+          </a:p>
+        </p:txBody>
+      </p:sp>
+      <p:sp>
+        <p:nvSpPr>
+          <p:cNvPr id="18" name="Text 16"/>
+          <p:cNvSpPr/>
+          <p:nvPr/>
+        </p:nvSpPr>
+        <p:spPr>
+          <a:xfrm>
+            <a:off x="6492240" y="4800600"/>
+            <a:ext cx="4480560" cy="640080"/>
+          </a:xfrm>
+          <a:prstGeom prst="rect">
+            <a:avLst/>
+          </a:prstGeom>
+          <a:noFill/>
+          <a:ln/>
+        </p:spPr>
+        <p:txBody>
+          <a:bodyPr wrap="square" rtlCol="0" anchor="ctr"/>
+          <a:lstStyle/>
+          <a:p>
+            <a:pPr indent="0" marL="0">
+              <a:buNone/>
+            </a:pPr>
+            <a:r>
+              <a:rPr lang="en-US" dirty="0">
+                <a:solidFill>
+                  <a:srgbClr val="725A4A"/>
+                </a:solidFill>
+                <a:latin typeface="Calibri" pitchFamily="34" charset="0"/>
+                <a:ea typeface="Calibri" pitchFamily="34" charset="-122"/>
+                <a:cs typeface="Calibri" pitchFamily="34" charset="-120"/>
+              </a:rPr>
+              <a:t>Student records, staff, attendance base</a:t>
+            </a:r>
+            <a:endParaRPr lang="en-US" dirty="0"/>
+          </a:p>
+        </p:txBody>
+      </p:sp>
+      <p:sp>
+        <p:nvSpPr>
+          <p:cNvPr id="19" name="Text 17"/>
+          <p:cNvSpPr/>
+          <p:nvPr/>
+        </p:nvSpPr>
+        <p:spPr>
+          <a:xfrm>
+            <a:off x="6492240" y="5440680"/>
+            <a:ext cx="4480560" cy="457200"/>
+          </a:xfrm>
+          <a:prstGeom prst="rect">
+            <a:avLst/>
+          </a:prstGeom>
+          <a:noFill/>
+          <a:ln/>
+        </p:spPr>
+        <p:txBody>
+          <a:bodyPr wrap="square" rtlCol="0" anchor="ctr"/>
+          <a:lstStyle/>
+          <a:p>
+            <a:pPr indent="0" marL="0">
+              <a:buNone/>
+            </a:pPr>
+            <a:r>
+              <a:rPr lang="en-US" i="1" dirty="0">
+                <a:solidFill>
+                  <a:srgbClr val="725A4A"/>
+                </a:solidFill>
+                <a:latin typeface="Calibri" pitchFamily="34" charset="0"/>
+                <a:ea typeface="Calibri" pitchFamily="34" charset="-122"/>
+                <a:cs typeface="Calibri" pitchFamily="34" charset="-120"/>
+              </a:rPr>
+              <a:t>Data organised</a:t>
+            </a:r>
+            <a:endParaRPr lang="en-US" dirty="0"/>
+          </a:p>
+        </p:txBody>
+      </p:sp>
+      <p:sp>
+        <p:nvSpPr>
+          <p:cNvPr id="20" name="Shape 18"/>
+          <p:cNvSpPr/>
+          <p:nvPr/>
+        </p:nvSpPr>
+        <p:spPr>
+          <a:xfrm>
+            <a:off x="731520" y="5852160"/>
+            <a:ext cx="10698480" cy="640080"/>
+          </a:xfrm>
+          <a:prstGeom prst="roundRect">
+            <a:avLst>
+              <a:gd name="adj" fmla="val 50000"/>
+            </a:avLst>
+          </a:prstGeom>
+          <a:solidFill>
+            <a:srgbClr val="FFC53D"/>
+          </a:solidFill>
+          <a:ln w="12700">
+            <a:solidFill>
+              <a:srgbClr val="FFC53D"/>
+            </a:solidFill>
+            <a:prstDash val="solid"/>
+          </a:ln>
+        </p:spPr>
+      </p:sp>
+      <p:sp>
+        <p:nvSpPr>
+          <p:cNvPr id="21" name="Text 19"/>
+          <p:cNvSpPr/>
+          <p:nvPr/>
+        </p:nvSpPr>
+        <p:spPr>
+          <a:xfrm>
+            <a:off x="731520" y="5852160"/>
+            <a:ext cx="10698480" cy="640080"/>
+          </a:xfrm>
+          <a:prstGeom prst="rect">
+            <a:avLst/>
+          </a:prstGeom>
+          <a:noFill/>
+          <a:ln/>
+        </p:spPr>
+        <p:txBody>
+          <a:bodyPr wrap="square" rtlCol="0" anchor="ctr"/>
+          <a:lstStyle/>
+          <a:p>
+            <a:pPr algn="ctr" indent="0" marL="0">
+              <a:buNone/>
+            </a:pPr>
+            <a:r>
+              <a:rPr lang="en-US" sz="1400" b="1" dirty="0">
+                <a:solidFill>
+                  <a:srgbClr val="3A2E29"/>
+                </a:solidFill>
+                <a:latin typeface="Calibri" pitchFamily="34" charset="0"/>
+                <a:ea typeface="Calibri" pitchFamily="34" charset="-122"/>
+                <a:cs typeface="Calibri" pitchFamily="34" charset="-120"/>
+              </a:rPr>
+              <a:t>Add-on pricing is simple and low: every add-on is Rs 1,000 or below per month.</a:t>
+            </a:r>
+            <a:endParaRPr lang="en-US" sz="1400" dirty="0"/>
+          </a:p>
+        </p:txBody>
+      </p:sp>
+    </p:spTree>
+  </p:cSld>
+  <p:clrMapOvr>
+    <a:masterClrMapping/>
+  </p:clrMapOvr>
+</p:sld>
+</file>
+
+<file path=ppt/slides/slide5.xml><?xml version="1.0" encoding="utf-8"?>
+<p:sld xmlns:a="http://schemas.openxmlformats.org/drawingml/2006/main" xmlns:r="http://schemas.openxmlformats.org/officeDocument/2006/relationships" xmlns:p="http://schemas.openxmlformats.org/presentationml/2006/main">
+  <p:cSld name="Slide 5">
     <p:bg>
       <p:bgPr>
         <a:solidFill>
@@ -4127,9 +4960,9 @@
 </p:sld>
 </file>
 
-<file path=ppt/slides/slide5.xml><?xml version="1.0" encoding="utf-8"?>
+<file path=ppt/slides/slide6.xml><?xml version="1.0" encoding="utf-8"?>
 <p:sld xmlns:a="http://schemas.openxmlformats.org/drawingml/2006/main" xmlns:r="http://schemas.openxmlformats.org/officeDocument/2006/relationships" xmlns:p="http://schemas.openxmlformats.org/presentationml/2006/main">
-  <p:cSld name="Slide 5">
+  <p:cSld name="Slide 6">
     <p:bg>
       <p:bgPr>
         <a:solidFill>
@@ -4199,7 +5032,7 @@
         <p:spPr>
           <a:xfrm>
             <a:off x="731520" y="1188720"/>
-            <a:ext cx="9509760" cy="457200"/>
+            <a:ext cx="10424160" cy="457200"/>
           </a:xfrm>
           <a:prstGeom prst="rect">
             <a:avLst/>
@@ -4223,7 +5056,7 @@
                 <a:ea typeface="Calibri" pitchFamily="34" charset="-122"/>
                 <a:cs typeface="Calibri" pitchFamily="34" charset="-120"/>
               </a:rPr>
-              <a:t>For schools that want to upload and maintain their own content — full control, no dependency</a:t>
+              <a:t>For schools that want to upload and maintain their own content — full control, no dependency. Available on both Tier 1 and Tier 2.</a:t>
             </a:r>
             <a:endParaRPr lang="en-US" dirty="0"/>
           </a:p>
@@ -4695,9 +5528,9 @@
 </p:sld>
 </file>
 
-<file path=ppt/slides/slide6.xml><?xml version="1.0" encoding="utf-8"?>
+<file path=ppt/slides/slide7.xml><?xml version="1.0" encoding="utf-8"?>
 <p:sld xmlns:a="http://schemas.openxmlformats.org/drawingml/2006/main" xmlns:r="http://schemas.openxmlformats.org/officeDocument/2006/relationships" xmlns:p="http://schemas.openxmlformats.org/presentationml/2006/main">
-  <p:cSld name="Slide 6">
+  <p:cSld name="Slide 7">
     <p:bg>
       <p:bgPr>
         <a:solidFill>
@@ -5652,9 +6485,9 @@
 </p:sld>
 </file>
 
-<file path=ppt/slides/slide7.xml><?xml version="1.0" encoding="utf-8"?>
+<file path=ppt/slides/slide8.xml><?xml version="1.0" encoding="utf-8"?>
 <p:sld xmlns:a="http://schemas.openxmlformats.org/drawingml/2006/main" xmlns:r="http://schemas.openxmlformats.org/officeDocument/2006/relationships" xmlns:p="http://schemas.openxmlformats.org/presentationml/2006/main">
-  <p:cSld name="Slide 7">
+  <p:cSld name="Slide 8">
     <p:bg>
       <p:bgPr>
         <a:solidFill>
